--- a/汇报PPT/1022-JCL_revised_v4.pptx
+++ b/汇报PPT/1022-JCL_revised_v4.pptx
@@ -13146,18 +13146,615 @@
       </p:sp>
       <p:sp>
         <p:nvSpPr>
-          <p:cNvPr id="6" name="Shape 4"/>
+          <p:cNvPr id="6" name="Text 4"/>
+          <p:cNvSpPr txBox="1"/>
+          <p:nvPr/>
+        </p:nvSpPr>
+        <p:spPr>
+          <a:xfrm>
+            <a:off x="548640" y="1463040"/>
+            <a:ext cx="4114800" cy="914400"/>
+          </a:xfrm>
+          <a:prstGeom prst="rect">
+            <a:avLst/>
+          </a:prstGeom>
+          <a:noFill/>
+          <a:ln/>
+        </p:spPr>
+        <p:txBody>
+          <a:bodyPr wrap="square" lIns="0" tIns="0" rIns="0" bIns="0" rtlCol="0" anchor="t"/>
+          <a:lstStyle/>
+          <a:p>
+            <a:pPr algn="l" indent="0" marL="0">
+              <a:lnSpc>
+                <a:spcPct val="105000"/>
+              </a:lnSpc>
+              <a:buNone/>
+            </a:pPr>
+            <a:r>
+              <a:rPr lang="en-US" sz="2600" b="1" dirty="0">
+                <a:solidFill>
+                  <a:srgbClr val="5B3A7E"/>
+                </a:solidFill>
+                <a:latin typeface="Microsoft YaHei" pitchFamily="34" charset="0"/>
+                <a:ea typeface="Microsoft YaHei" pitchFamily="34" charset="-122"/>
+                <a:cs typeface="Microsoft YaHei" pitchFamily="34" charset="-120"/>
+              </a:rPr>
+              <a:t>Journal of Child Language</a:t>
+            </a:r>
+            <a:endParaRPr lang="en-US" sz="2600" dirty="0"/>
+          </a:p>
+        </p:txBody>
+      </p:sp>
+      <p:sp>
+        <p:nvSpPr>
+          <p:cNvPr id="7" name="Text 5"/>
+          <p:cNvSpPr txBox="1"/>
+          <p:nvPr/>
+        </p:nvSpPr>
+        <p:spPr>
+          <a:xfrm>
+            <a:off x="548640" y="2395728"/>
+            <a:ext cx="4114800" cy="365760"/>
+          </a:xfrm>
+          <a:prstGeom prst="rect">
+            <a:avLst/>
+          </a:prstGeom>
+          <a:noFill/>
+          <a:ln/>
+        </p:spPr>
+        <p:txBody>
+          <a:bodyPr wrap="square" lIns="0" tIns="0" rIns="0" bIns="0" rtlCol="0" anchor="ctr"/>
+          <a:lstStyle/>
+          <a:p>
+            <a:pPr algn="l" indent="0" marL="0">
+              <a:buNone/>
+            </a:pPr>
+            <a:r>
+              <a:rPr lang="en-US" sz="1300" dirty="0">
+                <a:solidFill>
+                  <a:srgbClr val="6B6B6B"/>
+                </a:solidFill>
+                <a:latin typeface="Microsoft YaHei" pitchFamily="34" charset="0"/>
+                <a:ea typeface="Microsoft YaHei" pitchFamily="34" charset="-122"/>
+                <a:cs typeface="Microsoft YaHei" pitchFamily="34" charset="-120"/>
+              </a:rPr>
+              <a:t>Cambridge University Press</a:t>
+            </a:r>
+            <a:endParaRPr lang="en-US" sz="1300" dirty="0"/>
+          </a:p>
+        </p:txBody>
+      </p:sp>
+      <p:sp>
+        <p:nvSpPr>
+          <p:cNvPr id="8" name="Shape 6"/>
           <p:cNvSpPr/>
           <p:nvPr/>
         </p:nvSpPr>
         <p:spPr>
           <a:xfrm>
-            <a:off x="768096" y="1316736"/>
-            <a:ext cx="3322838" cy="4773168"/>
+            <a:off x="548640" y="2834640"/>
+            <a:ext cx="1005840" cy="365760"/>
           </a:xfrm>
           <a:prstGeom prst="roundRect">
             <a:avLst>
-              <a:gd name="adj" fmla="val 1101"/>
+              <a:gd name="adj" fmla="val 50000"/>
+            </a:avLst>
+          </a:prstGeom>
+          <a:solidFill>
+            <a:srgbClr val="EEEAF4"/>
+          </a:solidFill>
+          <a:ln w="12700">
+            <a:solidFill>
+              <a:srgbClr val="8A68B0"/>
+            </a:solidFill>
+            <a:prstDash val="solid"/>
+          </a:ln>
+        </p:spPr>
+      </p:sp>
+      <p:sp>
+        <p:nvSpPr>
+          <p:cNvPr id="9" name="Text 7"/>
+          <p:cNvSpPr txBox="1"/>
+          <p:nvPr/>
+        </p:nvSpPr>
+        <p:spPr>
+          <a:xfrm>
+            <a:off x="548640" y="2834640"/>
+            <a:ext cx="1005840" cy="365760"/>
+          </a:xfrm>
+          <a:prstGeom prst="rect">
+            <a:avLst/>
+          </a:prstGeom>
+          <a:noFill/>
+          <a:ln/>
+        </p:spPr>
+        <p:txBody>
+          <a:bodyPr wrap="square" lIns="0" tIns="0" rIns="0" bIns="0" rtlCol="0" anchor="ctr"/>
+          <a:lstStyle/>
+          <a:p>
+            <a:pPr algn="ctr" indent="0" marL="0">
+              <a:buNone/>
+            </a:pPr>
+            <a:r>
+              <a:rPr lang="en-US" sz="1200" b="1" dirty="0">
+                <a:solidFill>
+                  <a:srgbClr val="5B3A7E"/>
+                </a:solidFill>
+                <a:latin typeface="Microsoft YaHei" pitchFamily="34" charset="0"/>
+                <a:ea typeface="Microsoft YaHei" pitchFamily="34" charset="-122"/>
+                <a:cs typeface="Microsoft YaHei" pitchFamily="34" charset="-120"/>
+              </a:rPr>
+              <a:t>SSCI</a:t>
+            </a:r>
+            <a:endParaRPr lang="en-US" sz="1200" dirty="0"/>
+          </a:p>
+        </p:txBody>
+      </p:sp>
+      <p:sp>
+        <p:nvSpPr>
+          <p:cNvPr id="10" name="Shape 8"/>
+          <p:cNvSpPr/>
+          <p:nvPr/>
+        </p:nvSpPr>
+        <p:spPr>
+          <a:xfrm>
+            <a:off x="1737360" y="2834640"/>
+            <a:ext cx="2093976" cy="365760"/>
+          </a:xfrm>
+          <a:prstGeom prst="roundRect">
+            <a:avLst>
+              <a:gd name="adj" fmla="val 50000"/>
+            </a:avLst>
+          </a:prstGeom>
+          <a:solidFill>
+            <a:srgbClr val="EEEAF4"/>
+          </a:solidFill>
+          <a:ln w="12700">
+            <a:solidFill>
+              <a:srgbClr val="8A68B0"/>
+            </a:solidFill>
+            <a:prstDash val="solid"/>
+          </a:ln>
+        </p:spPr>
+      </p:sp>
+      <p:sp>
+        <p:nvSpPr>
+          <p:cNvPr id="11" name="Text 9"/>
+          <p:cNvSpPr txBox="1"/>
+          <p:nvPr/>
+        </p:nvSpPr>
+        <p:spPr>
+          <a:xfrm>
+            <a:off x="1737360" y="2834640"/>
+            <a:ext cx="2093976" cy="365760"/>
+          </a:xfrm>
+          <a:prstGeom prst="rect">
+            <a:avLst/>
+          </a:prstGeom>
+          <a:noFill/>
+          <a:ln/>
+        </p:spPr>
+        <p:txBody>
+          <a:bodyPr wrap="square" lIns="0" tIns="0" rIns="0" bIns="0" rtlCol="0" anchor="ctr"/>
+          <a:lstStyle/>
+          <a:p>
+            <a:pPr algn="ctr" indent="0" marL="0">
+              <a:buNone/>
+            </a:pPr>
+            <a:r>
+              <a:rPr lang="en-US" sz="1200" b="1" dirty="0">
+                <a:solidFill>
+                  <a:srgbClr val="5B3A7E"/>
+                </a:solidFill>
+                <a:latin typeface="Microsoft YaHei" pitchFamily="34" charset="0"/>
+                <a:ea typeface="Microsoft YaHei" pitchFamily="34" charset="-122"/>
+                <a:cs typeface="Microsoft YaHei" pitchFamily="34" charset="-120"/>
+              </a:rPr>
+              <a:t>Open Access</a:t>
+            </a:r>
+            <a:endParaRPr lang="en-US" sz="1200" dirty="0"/>
+          </a:p>
+        </p:txBody>
+      </p:sp>
+      <p:sp>
+        <p:nvSpPr>
+          <p:cNvPr id="12" name="Text 10"/>
+          <p:cNvSpPr txBox="1"/>
+          <p:nvPr/>
+        </p:nvSpPr>
+        <p:spPr>
+          <a:xfrm>
+            <a:off x="548640" y="3364992"/>
+            <a:ext cx="4114800" cy="457200"/>
+          </a:xfrm>
+          <a:prstGeom prst="rect">
+            <a:avLst/>
+          </a:prstGeom>
+          <a:noFill/>
+          <a:ln/>
+        </p:spPr>
+        <p:txBody>
+          <a:bodyPr wrap="square" lIns="0" tIns="0" rIns="0" bIns="0" rtlCol="0" anchor="ctr"/>
+          <a:lstStyle/>
+          <a:p>
+            <a:pPr algn="l" indent="0" marL="0">
+              <a:lnSpc>
+                <a:spcPct val="120000"/>
+              </a:lnSpc>
+              <a:buNone/>
+            </a:pPr>
+            <a:r>
+              <a:rPr lang="en-US" sz="1250" dirty="0">
+                <a:solidFill>
+                  <a:srgbClr val="262233"/>
+                </a:solidFill>
+                <a:latin typeface="Microsoft YaHei" pitchFamily="34" charset="0"/>
+                <a:ea typeface="Microsoft YaHei" pitchFamily="34" charset="-122"/>
+                <a:cs typeface="Microsoft YaHei" pitchFamily="34" charset="-120"/>
+              </a:rPr>
+              <a:t>2026, 1–25 · 开放获取</a:t>
+            </a:r>
+            <a:endParaRPr lang="en-US" sz="1250" dirty="0"/>
+          </a:p>
+        </p:txBody>
+      </p:sp>
+      <p:sp>
+        <p:nvSpPr>
+          <p:cNvPr id="13" name="Text 11"/>
+          <p:cNvSpPr txBox="1"/>
+          <p:nvPr/>
+        </p:nvSpPr>
+        <p:spPr>
+          <a:xfrm>
+            <a:off x="548640" y="3977640"/>
+            <a:ext cx="4114800" cy="320040"/>
+          </a:xfrm>
+          <a:prstGeom prst="rect">
+            <a:avLst/>
+          </a:prstGeom>
+          <a:noFill/>
+          <a:ln/>
+        </p:spPr>
+        <p:txBody>
+          <a:bodyPr wrap="square" lIns="0" tIns="0" rIns="0" bIns="0" rtlCol="0" anchor="ctr"/>
+          <a:lstStyle/>
+          <a:p>
+            <a:pPr algn="l" indent="0" marL="0">
+              <a:buNone/>
+            </a:pPr>
+            <a:r>
+              <a:rPr lang="en-US" sz="1500" b="1" dirty="0">
+                <a:solidFill>
+                  <a:srgbClr val="8A68B0"/>
+                </a:solidFill>
+                <a:latin typeface="Microsoft YaHei" pitchFamily="34" charset="0"/>
+                <a:ea typeface="Microsoft YaHei" pitchFamily="34" charset="-122"/>
+                <a:cs typeface="Microsoft YaHei" pitchFamily="34" charset="-120"/>
+              </a:rPr>
+              <a:t>核心发现</a:t>
+            </a:r>
+            <a:endParaRPr lang="en-US" sz="1500" dirty="0"/>
+          </a:p>
+        </p:txBody>
+      </p:sp>
+      <p:sp>
+        <p:nvSpPr>
+          <p:cNvPr id="14" name="Shape 12"/>
+          <p:cNvSpPr/>
+          <p:nvPr/>
+        </p:nvSpPr>
+        <p:spPr>
+          <a:xfrm>
+            <a:off x="548640" y="4434840"/>
+            <a:ext cx="384048" cy="384048"/>
+          </a:xfrm>
+          <a:prstGeom prst="ellipse">
+            <a:avLst/>
+          </a:prstGeom>
+          <a:solidFill>
+            <a:srgbClr val="8A68B0"/>
+          </a:solidFill>
+          <a:ln/>
+        </p:spPr>
+      </p:sp>
+      <p:sp>
+        <p:nvSpPr>
+          <p:cNvPr id="15" name="Text 13"/>
+          <p:cNvSpPr txBox="1"/>
+          <p:nvPr/>
+        </p:nvSpPr>
+        <p:spPr>
+          <a:xfrm>
+            <a:off x="548640" y="4434840"/>
+            <a:ext cx="384048" cy="384048"/>
+          </a:xfrm>
+          <a:prstGeom prst="rect">
+            <a:avLst/>
+          </a:prstGeom>
+          <a:noFill/>
+          <a:ln/>
+        </p:spPr>
+        <p:txBody>
+          <a:bodyPr wrap="square" lIns="0" tIns="0" rIns="0" bIns="0" rtlCol="0" anchor="ctr"/>
+          <a:lstStyle/>
+          <a:p>
+            <a:pPr algn="ctr" indent="0" marL="0">
+              <a:buNone/>
+            </a:pPr>
+            <a:r>
+              <a:rPr lang="en-US" sz="1800" b="1" dirty="0">
+                <a:solidFill>
+                  <a:srgbClr val="FFFFFF"/>
+                </a:solidFill>
+                <a:latin typeface="Microsoft YaHei" pitchFamily="34" charset="0"/>
+                <a:ea typeface="Microsoft YaHei" pitchFamily="34" charset="-122"/>
+                <a:cs typeface="Microsoft YaHei" pitchFamily="34" charset="-120"/>
+              </a:rPr>
+              <a:t>1</a:t>
+            </a:r>
+            <a:endParaRPr lang="en-US" sz="1800" dirty="0"/>
+          </a:p>
+        </p:txBody>
+      </p:sp>
+      <p:sp>
+        <p:nvSpPr>
+          <p:cNvPr id="16" name="Text 14"/>
+          <p:cNvSpPr txBox="1"/>
+          <p:nvPr/>
+        </p:nvSpPr>
+        <p:spPr>
+          <a:xfrm>
+            <a:off x="1161288" y="4389120"/>
+            <a:ext cx="3502152" cy="676656"/>
+          </a:xfrm>
+          <a:prstGeom prst="rect">
+            <a:avLst/>
+          </a:prstGeom>
+          <a:noFill/>
+          <a:ln/>
+        </p:spPr>
+        <p:txBody>
+          <a:bodyPr wrap="square" lIns="0" tIns="0" rIns="0" bIns="0" rtlCol="0" anchor="ctr"/>
+          <a:lstStyle/>
+          <a:p>
+            <a:pPr algn="l" indent="0" marL="0">
+              <a:lnSpc>
+                <a:spcPct val="122000"/>
+              </a:lnSpc>
+              <a:buNone/>
+            </a:pPr>
+            <a:r>
+              <a:rPr lang="en-US" sz="1300" dirty="0">
+                <a:solidFill>
+                  <a:srgbClr val="262233"/>
+                </a:solidFill>
+                <a:latin typeface="Microsoft YaHei" pitchFamily="34" charset="0"/>
+                <a:ea typeface="Microsoft YaHei" pitchFamily="34" charset="-122"/>
+                <a:cs typeface="Microsoft YaHei" pitchFamily="34" charset="-120"/>
+              </a:rPr>
+              <a:t>母语汉语网络趋于整合与共享，结构更趋稳定</a:t>
+            </a:r>
+            <a:endParaRPr lang="en-US" sz="1300" dirty="0"/>
+          </a:p>
+        </p:txBody>
+      </p:sp>
+      <p:sp>
+        <p:nvSpPr>
+          <p:cNvPr id="17" name="Shape 15"/>
+          <p:cNvSpPr/>
+          <p:nvPr/>
+        </p:nvSpPr>
+        <p:spPr>
+          <a:xfrm>
+            <a:off x="548640" y="5111496"/>
+            <a:ext cx="384048" cy="384048"/>
+          </a:xfrm>
+          <a:prstGeom prst="ellipse">
+            <a:avLst/>
+          </a:prstGeom>
+          <a:solidFill>
+            <a:srgbClr val="8A68B0"/>
+          </a:solidFill>
+          <a:ln/>
+        </p:spPr>
+      </p:sp>
+      <p:sp>
+        <p:nvSpPr>
+          <p:cNvPr id="18" name="Text 16"/>
+          <p:cNvSpPr txBox="1"/>
+          <p:nvPr/>
+        </p:nvSpPr>
+        <p:spPr>
+          <a:xfrm>
+            <a:off x="548640" y="5111496"/>
+            <a:ext cx="384048" cy="384048"/>
+          </a:xfrm>
+          <a:prstGeom prst="rect">
+            <a:avLst/>
+          </a:prstGeom>
+          <a:noFill/>
+          <a:ln/>
+        </p:spPr>
+        <p:txBody>
+          <a:bodyPr wrap="square" lIns="0" tIns="0" rIns="0" bIns="0" rtlCol="0" anchor="ctr"/>
+          <a:lstStyle/>
+          <a:p>
+            <a:pPr algn="ctr" indent="0" marL="0">
+              <a:buNone/>
+            </a:pPr>
+            <a:r>
+              <a:rPr lang="en-US" sz="1800" b="1" dirty="0">
+                <a:solidFill>
+                  <a:srgbClr val="FFFFFF"/>
+                </a:solidFill>
+                <a:latin typeface="Microsoft YaHei" pitchFamily="34" charset="0"/>
+                <a:ea typeface="Microsoft YaHei" pitchFamily="34" charset="-122"/>
+                <a:cs typeface="Microsoft YaHei" pitchFamily="34" charset="-120"/>
+              </a:rPr>
+              <a:t>2</a:t>
+            </a:r>
+            <a:endParaRPr lang="en-US" sz="1800" dirty="0"/>
+          </a:p>
+        </p:txBody>
+      </p:sp>
+      <p:sp>
+        <p:nvSpPr>
+          <p:cNvPr id="19" name="Text 17"/>
+          <p:cNvSpPr txBox="1"/>
+          <p:nvPr/>
+        </p:nvSpPr>
+        <p:spPr>
+          <a:xfrm>
+            <a:off x="1161288" y="5065776"/>
+            <a:ext cx="3502152" cy="676656"/>
+          </a:xfrm>
+          <a:prstGeom prst="rect">
+            <a:avLst/>
+          </a:prstGeom>
+          <a:noFill/>
+          <a:ln/>
+        </p:spPr>
+        <p:txBody>
+          <a:bodyPr wrap="square" lIns="0" tIns="0" rIns="0" bIns="0" rtlCol="0" anchor="ctr"/>
+          <a:lstStyle/>
+          <a:p>
+            <a:pPr algn="l" indent="0" marL="0">
+              <a:lnSpc>
+                <a:spcPct val="122000"/>
+              </a:lnSpc>
+              <a:buNone/>
+            </a:pPr>
+            <a:r>
+              <a:rPr lang="en-US" sz="1300" dirty="0">
+                <a:solidFill>
+                  <a:srgbClr val="262233"/>
+                </a:solidFill>
+                <a:latin typeface="Microsoft YaHei" pitchFamily="34" charset="0"/>
+                <a:ea typeface="Microsoft YaHei" pitchFamily="34" charset="-122"/>
+                <a:cs typeface="Microsoft YaHei" pitchFamily="34" charset="-120"/>
+              </a:rPr>
+              <a:t>二语英语网络持续扩展，并形成更清晰的局部结构</a:t>
+            </a:r>
+            <a:endParaRPr lang="en-US" sz="1300" dirty="0"/>
+          </a:p>
+        </p:txBody>
+      </p:sp>
+      <p:sp>
+        <p:nvSpPr>
+          <p:cNvPr id="20" name="Shape 18"/>
+          <p:cNvSpPr/>
+          <p:nvPr/>
+        </p:nvSpPr>
+        <p:spPr>
+          <a:xfrm>
+            <a:off x="548640" y="5788152"/>
+            <a:ext cx="384048" cy="384048"/>
+          </a:xfrm>
+          <a:prstGeom prst="ellipse">
+            <a:avLst/>
+          </a:prstGeom>
+          <a:solidFill>
+            <a:srgbClr val="8A68B0"/>
+          </a:solidFill>
+          <a:ln/>
+        </p:spPr>
+      </p:sp>
+      <p:sp>
+        <p:nvSpPr>
+          <p:cNvPr id="21" name="Text 19"/>
+          <p:cNvSpPr txBox="1"/>
+          <p:nvPr/>
+        </p:nvSpPr>
+        <p:spPr>
+          <a:xfrm>
+            <a:off x="548640" y="5788152"/>
+            <a:ext cx="384048" cy="384048"/>
+          </a:xfrm>
+          <a:prstGeom prst="rect">
+            <a:avLst/>
+          </a:prstGeom>
+          <a:noFill/>
+          <a:ln/>
+        </p:spPr>
+        <p:txBody>
+          <a:bodyPr wrap="square" lIns="0" tIns="0" rIns="0" bIns="0" rtlCol="0" anchor="ctr"/>
+          <a:lstStyle/>
+          <a:p>
+            <a:pPr algn="ctr" indent="0" marL="0">
+              <a:buNone/>
+            </a:pPr>
+            <a:r>
+              <a:rPr lang="en-US" sz="1800" b="1" dirty="0">
+                <a:solidFill>
+                  <a:srgbClr val="FFFFFF"/>
+                </a:solidFill>
+                <a:latin typeface="Microsoft YaHei" pitchFamily="34" charset="0"/>
+                <a:ea typeface="Microsoft YaHei" pitchFamily="34" charset="-122"/>
+                <a:cs typeface="Microsoft YaHei" pitchFamily="34" charset="-120"/>
+              </a:rPr>
+              <a:t>3</a:t>
+            </a:r>
+            <a:endParaRPr lang="en-US" sz="1800" dirty="0"/>
+          </a:p>
+        </p:txBody>
+      </p:sp>
+      <p:sp>
+        <p:nvSpPr>
+          <p:cNvPr id="22" name="Text 20"/>
+          <p:cNvSpPr txBox="1"/>
+          <p:nvPr/>
+        </p:nvSpPr>
+        <p:spPr>
+          <a:xfrm>
+            <a:off x="1161288" y="5742432"/>
+            <a:ext cx="3502152" cy="676656"/>
+          </a:xfrm>
+          <a:prstGeom prst="rect">
+            <a:avLst/>
+          </a:prstGeom>
+          <a:noFill/>
+          <a:ln/>
+        </p:spPr>
+        <p:txBody>
+          <a:bodyPr wrap="square" lIns="0" tIns="0" rIns="0" bIns="0" rtlCol="0" anchor="ctr"/>
+          <a:lstStyle/>
+          <a:p>
+            <a:pPr algn="l" indent="0" marL="0">
+              <a:lnSpc>
+                <a:spcPct val="122000"/>
+              </a:lnSpc>
+              <a:buNone/>
+            </a:pPr>
+            <a:r>
+              <a:rPr lang="en-US" sz="1300" dirty="0">
+                <a:solidFill>
+                  <a:srgbClr val="262233"/>
+                </a:solidFill>
+                <a:latin typeface="Microsoft YaHei" pitchFamily="34" charset="0"/>
+                <a:ea typeface="Microsoft YaHei" pitchFamily="34" charset="-122"/>
+                <a:cs typeface="Microsoft YaHei" pitchFamily="34" charset="-120"/>
+              </a:rPr>
+              <a:t>从初二到高二，母语与二语的全局网络差异明显缩小</a:t>
+            </a:r>
+            <a:endParaRPr lang="en-US" sz="1300" dirty="0"/>
+          </a:p>
+        </p:txBody>
+      </p:sp>
+      <p:sp>
+        <p:nvSpPr>
+          <p:cNvPr id="23" name="Shape 21"/>
+          <p:cNvSpPr/>
+          <p:nvPr/>
+        </p:nvSpPr>
+        <p:spPr>
+          <a:xfrm>
+            <a:off x="4983480" y="1508760"/>
+            <a:ext cx="3154680" cy="4343400"/>
+          </a:xfrm>
+          <a:prstGeom prst="roundRect">
+            <a:avLst>
+              <a:gd name="adj" fmla="val 1449"/>
             </a:avLst>
           </a:prstGeom>
           <a:solidFill>
@@ -13170,7 +13767,7 @@
             <a:prstDash val="solid"/>
           </a:ln>
           <a:effectLst>
-            <a:outerShdw sx="100000" sy="100000" kx="0" ky="0" algn="bl" rotWithShape="0" blurRad="101600" dist="38100" dir="5400000">
+            <a:outerShdw sx="100000" sy="100000" kx="0" ky="0" algn="bl" rotWithShape="0" blurRad="88900" dist="38100" dir="5400000">
               <a:srgbClr val="999999">
                 <a:alpha val="40000"/>
               </a:srgbClr>
@@ -13180,7 +13777,7 @@
       </p:sp>
       <p:pic>
         <p:nvPicPr>
-          <p:cNvPr id="7" name="Image 0" descr="/tmp/claude-0/-home-user-NATIONAL-SS-Funding/d399dd62-2b1c-5986-baf9-d080933e5780/scratchpad/ppt-work/assets/trim-JCL-first-01.jpg">    </p:cNvPr>
+          <p:cNvPr id="24" name="Image 0" descr="/tmp/claude-0/-home-user-NATIONAL-SS-Funding/d399dd62-2b1c-5986-baf9-d080933e5780/scratchpad/ppt-work/assets/cover-JCL.jpg">    </p:cNvPr>
           <p:cNvPicPr>
             <a:picLocks noChangeAspect="1"/>
           </p:cNvPicPr>
@@ -13194,8 +13791,8 @@
         </p:blipFill>
         <p:spPr>
           <a:xfrm>
-            <a:off x="822960" y="1371600"/>
-            <a:ext cx="3213110" cy="4663440"/>
+            <a:off x="5093208" y="2151698"/>
+            <a:ext cx="2935224" cy="3057525"/>
           </a:xfrm>
           <a:prstGeom prst="rect">
             <a:avLst/>
@@ -13204,14 +13801,14 @@
       </p:pic>
       <p:sp>
         <p:nvSpPr>
-          <p:cNvPr id="8" name="Text 5"/>
+          <p:cNvPr id="25" name="Text 22"/>
           <p:cNvSpPr txBox="1"/>
           <p:nvPr/>
         </p:nvSpPr>
         <p:spPr>
           <a:xfrm>
-            <a:off x="822960" y="6163056"/>
-            <a:ext cx="3213110" cy="274320"/>
+            <a:off x="4983480" y="5897880"/>
+            <a:ext cx="3154680" cy="292608"/>
           </a:xfrm>
           <a:prstGeom prst="rect">
             <a:avLst/>
@@ -13227,49 +13824,7 @@
               <a:buNone/>
             </a:pPr>
             <a:r>
-              <a:rPr lang="en-US" sz="1150" i="1" dirty="0">
-                <a:solidFill>
-                  <a:srgbClr val="6B6B6B"/>
-                </a:solidFill>
-                <a:latin typeface="Microsoft YaHei" pitchFamily="34" charset="0"/>
-                <a:ea typeface="Microsoft YaHei" pitchFamily="34" charset="-122"/>
-                <a:cs typeface="Microsoft YaHei" pitchFamily="34" charset="-120"/>
-              </a:rPr>
-              <a:t>论文首页 · Published article</a:t>
-            </a:r>
-            <a:endParaRPr lang="en-US" sz="1150" dirty="0"/>
-          </a:p>
-        </p:txBody>
-      </p:sp>
-      <p:sp>
-        <p:nvSpPr>
-          <p:cNvPr id="9" name="Text 6"/>
-          <p:cNvSpPr txBox="1"/>
-          <p:nvPr/>
-        </p:nvSpPr>
-        <p:spPr>
-          <a:xfrm>
-            <a:off x="4676150" y="1463040"/>
-            <a:ext cx="6875465" cy="822960"/>
-          </a:xfrm>
-          <a:prstGeom prst="rect">
-            <a:avLst/>
-          </a:prstGeom>
-          <a:noFill/>
-          <a:ln/>
-        </p:spPr>
-        <p:txBody>
-          <a:bodyPr wrap="square" lIns="0" tIns="0" rIns="0" bIns="0" rtlCol="0" anchor="t"/>
-          <a:lstStyle/>
-          <a:p>
-            <a:pPr algn="l" indent="0" marL="0">
-              <a:lnSpc>
-                <a:spcPct val="105000"/>
-              </a:lnSpc>
-              <a:buNone/>
-            </a:pPr>
-            <a:r>
-              <a:rPr lang="en-US" sz="3000" b="1" dirty="0">
+              <a:rPr lang="en-US" sz="1250" b="1" dirty="0">
                 <a:solidFill>
                   <a:srgbClr val="5B3A7E"/>
                 </a:solidFill>
@@ -13277,88 +13832,80 @@
                 <a:ea typeface="Microsoft YaHei" pitchFamily="34" charset="-122"/>
                 <a:cs typeface="Microsoft YaHei" pitchFamily="34" charset="-120"/>
               </a:rPr>
-              <a:t>Journal of Child Language</a:t>
-            </a:r>
-            <a:endParaRPr lang="en-US" sz="3000" dirty="0"/>
+              <a:t>期刊当期目录</a:t>
+            </a:r>
+            <a:endParaRPr lang="en-US" sz="1250" dirty="0"/>
           </a:p>
         </p:txBody>
       </p:sp>
       <p:sp>
         <p:nvSpPr>
-          <p:cNvPr id="10" name="Text 7"/>
-          <p:cNvSpPr txBox="1"/>
-          <p:nvPr/>
-        </p:nvSpPr>
-        <p:spPr>
-          <a:xfrm>
-            <a:off x="4676150" y="2286000"/>
-            <a:ext cx="6875465" cy="365760"/>
-          </a:xfrm>
-          <a:prstGeom prst="rect">
-            <a:avLst/>
-          </a:prstGeom>
-          <a:noFill/>
-          <a:ln/>
-        </p:spPr>
-        <p:txBody>
-          <a:bodyPr wrap="square" lIns="0" tIns="0" rIns="0" bIns="0" rtlCol="0" anchor="ctr"/>
-          <a:lstStyle/>
-          <a:p>
-            <a:pPr algn="l" indent="0" marL="0">
-              <a:buNone/>
-            </a:pPr>
-            <a:r>
-              <a:rPr lang="en-US" sz="1400" dirty="0">
-                <a:solidFill>
-                  <a:srgbClr val="6B6B6B"/>
-                </a:solidFill>
-                <a:latin typeface="Microsoft YaHei" pitchFamily="34" charset="0"/>
-                <a:ea typeface="Microsoft YaHei" pitchFamily="34" charset="-122"/>
-                <a:cs typeface="Microsoft YaHei" pitchFamily="34" charset="-120"/>
-              </a:rPr>
-              <a:t>Cambridge University Press</a:t>
-            </a:r>
-            <a:endParaRPr lang="en-US" sz="1400" dirty="0"/>
-          </a:p>
-        </p:txBody>
-      </p:sp>
-      <p:sp>
-        <p:nvSpPr>
-          <p:cNvPr id="11" name="Shape 8"/>
+          <p:cNvPr id="26" name="Shape 23"/>
           <p:cNvSpPr/>
           <p:nvPr/>
         </p:nvSpPr>
         <p:spPr>
           <a:xfrm>
-            <a:off x="4676150" y="2743200"/>
-            <a:ext cx="1005840" cy="365760"/>
+            <a:off x="8503920" y="1508760"/>
+            <a:ext cx="3154680" cy="4343400"/>
           </a:xfrm>
           <a:prstGeom prst="roundRect">
             <a:avLst>
-              <a:gd name="adj" fmla="val 50000"/>
+              <a:gd name="adj" fmla="val 1449"/>
             </a:avLst>
           </a:prstGeom>
           <a:solidFill>
-            <a:srgbClr val="EEEAF4"/>
+            <a:srgbClr val="FFFFFF"/>
           </a:solidFill>
-          <a:ln w="12700">
+          <a:ln w="15875">
             <a:solidFill>
               <a:srgbClr val="8A68B0"/>
             </a:solidFill>
             <a:prstDash val="solid"/>
           </a:ln>
-        </p:spPr>
-      </p:sp>
-      <p:sp>
-        <p:nvSpPr>
-          <p:cNvPr id="12" name="Text 9"/>
+          <a:effectLst>
+            <a:outerShdw sx="100000" sy="100000" kx="0" ky="0" algn="bl" rotWithShape="0" blurRad="88900" dist="38100" dir="5400000">
+              <a:srgbClr val="999999">
+                <a:alpha val="40000"/>
+              </a:srgbClr>
+            </a:outerShdw>
+          </a:effectLst>
+        </p:spPr>
+      </p:sp>
+      <p:pic>
+        <p:nvPicPr>
+          <p:cNvPr id="27" name="Image 1" descr="/tmp/claude-0/-home-user-NATIONAL-SS-Funding/d399dd62-2b1c-5986-baf9-d080933e5780/scratchpad/ppt-work/assets/trim-JCL-first-01.jpg">    </p:cNvPr>
+          <p:cNvPicPr>
+            <a:picLocks noChangeAspect="1"/>
+          </p:cNvPicPr>
+          <p:nvPr/>
+        </p:nvPicPr>
+        <p:blipFill>
+          <a:blip r:embed="rId2"/>
+          <a:stretch>
+            <a:fillRect/>
+          </a:stretch>
+        </p:blipFill>
+        <p:spPr>
+          <a:xfrm>
+            <a:off x="8660561" y="1618488"/>
+            <a:ext cx="2841397" cy="4123944"/>
+          </a:xfrm>
+          <a:prstGeom prst="rect">
+            <a:avLst/>
+          </a:prstGeom>
+        </p:spPr>
+      </p:pic>
+      <p:sp>
+        <p:nvSpPr>
+          <p:cNvPr id="28" name="Text 24"/>
           <p:cNvSpPr txBox="1"/>
           <p:nvPr/>
         </p:nvSpPr>
         <p:spPr>
           <a:xfrm>
-            <a:off x="4676150" y="2743200"/>
-            <a:ext cx="1005840" cy="365760"/>
+            <a:off x="8503920" y="5897880"/>
+            <a:ext cx="3154680" cy="292608"/>
           </a:xfrm>
           <a:prstGeom prst="rect">
             <a:avLst/>
@@ -13374,7 +13921,7 @@
               <a:buNone/>
             </a:pPr>
             <a:r>
-              <a:rPr lang="en-US" sz="1200" b="1" dirty="0">
+              <a:rPr lang="en-US" sz="1250" b="1" dirty="0">
                 <a:solidFill>
                   <a:srgbClr val="5B3A7E"/>
                 </a:solidFill>
@@ -13382,459 +13929,9 @@
                 <a:ea typeface="Microsoft YaHei" pitchFamily="34" charset="-122"/>
                 <a:cs typeface="Microsoft YaHei" pitchFamily="34" charset="-120"/>
               </a:rPr>
-              <a:t>SSCI</a:t>
-            </a:r>
-            <a:endParaRPr lang="en-US" sz="1200" dirty="0"/>
-          </a:p>
-        </p:txBody>
-      </p:sp>
-      <p:sp>
-        <p:nvSpPr>
-          <p:cNvPr id="13" name="Shape 10"/>
-          <p:cNvSpPr/>
-          <p:nvPr/>
-        </p:nvSpPr>
-        <p:spPr>
-          <a:xfrm>
-            <a:off x="5864870" y="2743200"/>
-            <a:ext cx="2093976" cy="365760"/>
-          </a:xfrm>
-          <a:prstGeom prst="roundRect">
-            <a:avLst>
-              <a:gd name="adj" fmla="val 50000"/>
-            </a:avLst>
-          </a:prstGeom>
-          <a:solidFill>
-            <a:srgbClr val="EEEAF4"/>
-          </a:solidFill>
-          <a:ln w="12700">
-            <a:solidFill>
-              <a:srgbClr val="8A68B0"/>
-            </a:solidFill>
-            <a:prstDash val="solid"/>
-          </a:ln>
-        </p:spPr>
-      </p:sp>
-      <p:sp>
-        <p:nvSpPr>
-          <p:cNvPr id="14" name="Text 11"/>
-          <p:cNvSpPr txBox="1"/>
-          <p:nvPr/>
-        </p:nvSpPr>
-        <p:spPr>
-          <a:xfrm>
-            <a:off x="5864870" y="2743200"/>
-            <a:ext cx="2093976" cy="365760"/>
-          </a:xfrm>
-          <a:prstGeom prst="rect">
-            <a:avLst/>
-          </a:prstGeom>
-          <a:noFill/>
-          <a:ln/>
-        </p:spPr>
-        <p:txBody>
-          <a:bodyPr wrap="square" lIns="0" tIns="0" rIns="0" bIns="0" rtlCol="0" anchor="ctr"/>
-          <a:lstStyle/>
-          <a:p>
-            <a:pPr algn="ctr" indent="0" marL="0">
-              <a:buNone/>
-            </a:pPr>
-            <a:r>
-              <a:rPr lang="en-US" sz="1200" b="1" dirty="0">
-                <a:solidFill>
-                  <a:srgbClr val="5B3A7E"/>
-                </a:solidFill>
-                <a:latin typeface="Microsoft YaHei" pitchFamily="34" charset="0"/>
-                <a:ea typeface="Microsoft YaHei" pitchFamily="34" charset="-122"/>
-                <a:cs typeface="Microsoft YaHei" pitchFamily="34" charset="-120"/>
-              </a:rPr>
-              <a:t>Open Access</a:t>
-            </a:r>
-            <a:endParaRPr lang="en-US" sz="1200" dirty="0"/>
-          </a:p>
-        </p:txBody>
-      </p:sp>
-      <p:sp>
-        <p:nvSpPr>
-          <p:cNvPr id="15" name="Text 12"/>
-          <p:cNvSpPr txBox="1"/>
-          <p:nvPr/>
-        </p:nvSpPr>
-        <p:spPr>
-          <a:xfrm>
-            <a:off x="4676150" y="3291840"/>
-            <a:ext cx="6875465" cy="457200"/>
-          </a:xfrm>
-          <a:prstGeom prst="rect">
-            <a:avLst/>
-          </a:prstGeom>
-          <a:noFill/>
-          <a:ln/>
-        </p:spPr>
-        <p:txBody>
-          <a:bodyPr wrap="square" lIns="0" tIns="0" rIns="0" bIns="0" rtlCol="0" anchor="ctr"/>
-          <a:lstStyle/>
-          <a:p>
-            <a:pPr algn="l" indent="0" marL="0">
-              <a:lnSpc>
-                <a:spcPct val="120000"/>
-              </a:lnSpc>
-              <a:buNone/>
-            </a:pPr>
-            <a:r>
-              <a:rPr lang="en-US" sz="1300" dirty="0">
-                <a:solidFill>
-                  <a:srgbClr val="262233"/>
-                </a:solidFill>
-                <a:latin typeface="Microsoft YaHei" pitchFamily="34" charset="0"/>
-                <a:ea typeface="Microsoft YaHei" pitchFamily="34" charset="-122"/>
-                <a:cs typeface="Microsoft YaHei" pitchFamily="34" charset="-120"/>
-              </a:rPr>
-              <a:t>2026, 1–25 · 开放获取</a:t>
-            </a:r>
-            <a:endParaRPr lang="en-US" sz="1300" dirty="0"/>
-          </a:p>
-        </p:txBody>
-      </p:sp>
-      <p:sp>
-        <p:nvSpPr>
-          <p:cNvPr id="16" name="Text 13"/>
-          <p:cNvSpPr txBox="1"/>
-          <p:nvPr/>
-        </p:nvSpPr>
-        <p:spPr>
-          <a:xfrm>
-            <a:off x="4676150" y="3886200"/>
-            <a:ext cx="6875465" cy="320040"/>
-          </a:xfrm>
-          <a:prstGeom prst="rect">
-            <a:avLst/>
-          </a:prstGeom>
-          <a:noFill/>
-          <a:ln/>
-        </p:spPr>
-        <p:txBody>
-          <a:bodyPr wrap="square" lIns="0" tIns="0" rIns="0" bIns="0" rtlCol="0" anchor="ctr"/>
-          <a:lstStyle/>
-          <a:p>
-            <a:pPr algn="l" indent="0" marL="0">
-              <a:buNone/>
-            </a:pPr>
-            <a:r>
-              <a:rPr lang="en-US" sz="1500" b="1" dirty="0">
-                <a:solidFill>
-                  <a:srgbClr val="8A68B0"/>
-                </a:solidFill>
-                <a:latin typeface="Microsoft YaHei" pitchFamily="34" charset="0"/>
-                <a:ea typeface="Microsoft YaHei" pitchFamily="34" charset="-122"/>
-                <a:cs typeface="Microsoft YaHei" pitchFamily="34" charset="-120"/>
-              </a:rPr>
-              <a:t>核心发现</a:t>
-            </a:r>
-            <a:endParaRPr lang="en-US" sz="1500" dirty="0"/>
-          </a:p>
-        </p:txBody>
-      </p:sp>
-      <p:sp>
-        <p:nvSpPr>
-          <p:cNvPr id="17" name="Shape 14"/>
-          <p:cNvSpPr/>
-          <p:nvPr/>
-        </p:nvSpPr>
-        <p:spPr>
-          <a:xfrm>
-            <a:off x="4676150" y="4343400"/>
-            <a:ext cx="384048" cy="384048"/>
-          </a:xfrm>
-          <a:prstGeom prst="ellipse">
-            <a:avLst/>
-          </a:prstGeom>
-          <a:solidFill>
-            <a:srgbClr val="8A68B0"/>
-          </a:solidFill>
-          <a:ln/>
-        </p:spPr>
-      </p:sp>
-      <p:sp>
-        <p:nvSpPr>
-          <p:cNvPr id="18" name="Text 15"/>
-          <p:cNvSpPr txBox="1"/>
-          <p:nvPr/>
-        </p:nvSpPr>
-        <p:spPr>
-          <a:xfrm>
-            <a:off x="4676150" y="4343400"/>
-            <a:ext cx="384048" cy="384048"/>
-          </a:xfrm>
-          <a:prstGeom prst="rect">
-            <a:avLst/>
-          </a:prstGeom>
-          <a:noFill/>
-          <a:ln/>
-        </p:spPr>
-        <p:txBody>
-          <a:bodyPr wrap="square" lIns="0" tIns="0" rIns="0" bIns="0" rtlCol="0" anchor="ctr"/>
-          <a:lstStyle/>
-          <a:p>
-            <a:pPr algn="ctr" indent="0" marL="0">
-              <a:buNone/>
-            </a:pPr>
-            <a:r>
-              <a:rPr lang="en-US" sz="1800" b="1" dirty="0">
-                <a:solidFill>
-                  <a:srgbClr val="FFFFFF"/>
-                </a:solidFill>
-                <a:latin typeface="Microsoft YaHei" pitchFamily="34" charset="0"/>
-                <a:ea typeface="Microsoft YaHei" pitchFamily="34" charset="-122"/>
-                <a:cs typeface="Microsoft YaHei" pitchFamily="34" charset="-120"/>
-              </a:rPr>
-              <a:t>1</a:t>
-            </a:r>
-            <a:endParaRPr lang="en-US" sz="1800" dirty="0"/>
-          </a:p>
-        </p:txBody>
-      </p:sp>
-      <p:sp>
-        <p:nvSpPr>
-          <p:cNvPr id="19" name="Text 16"/>
-          <p:cNvSpPr txBox="1"/>
-          <p:nvPr/>
-        </p:nvSpPr>
-        <p:spPr>
-          <a:xfrm>
-            <a:off x="5288798" y="4297680"/>
-            <a:ext cx="6262817" cy="713232"/>
-          </a:xfrm>
-          <a:prstGeom prst="rect">
-            <a:avLst/>
-          </a:prstGeom>
-          <a:noFill/>
-          <a:ln/>
-        </p:spPr>
-        <p:txBody>
-          <a:bodyPr wrap="square" lIns="0" tIns="0" rIns="0" bIns="0" rtlCol="0" anchor="ctr"/>
-          <a:lstStyle/>
-          <a:p>
-            <a:pPr algn="l" indent="0" marL="0">
-              <a:lnSpc>
-                <a:spcPct val="122000"/>
-              </a:lnSpc>
-              <a:buNone/>
-            </a:pPr>
-            <a:r>
-              <a:rPr lang="en-US" sz="1450" dirty="0">
-                <a:solidFill>
-                  <a:srgbClr val="262233"/>
-                </a:solidFill>
-                <a:latin typeface="Microsoft YaHei" pitchFamily="34" charset="0"/>
-                <a:ea typeface="Microsoft YaHei" pitchFamily="34" charset="-122"/>
-                <a:cs typeface="Microsoft YaHei" pitchFamily="34" charset="-120"/>
-              </a:rPr>
-              <a:t>母语汉语网络趋于整合与共享，结构更趋稳定</a:t>
-            </a:r>
-            <a:endParaRPr lang="en-US" sz="1450" dirty="0"/>
-          </a:p>
-        </p:txBody>
-      </p:sp>
-      <p:sp>
-        <p:nvSpPr>
-          <p:cNvPr id="20" name="Shape 17"/>
-          <p:cNvSpPr/>
-          <p:nvPr/>
-        </p:nvSpPr>
-        <p:spPr>
-          <a:xfrm>
-            <a:off x="4676150" y="5056632"/>
-            <a:ext cx="384048" cy="384048"/>
-          </a:xfrm>
-          <a:prstGeom prst="ellipse">
-            <a:avLst/>
-          </a:prstGeom>
-          <a:solidFill>
-            <a:srgbClr val="8A68B0"/>
-          </a:solidFill>
-          <a:ln/>
-        </p:spPr>
-      </p:sp>
-      <p:sp>
-        <p:nvSpPr>
-          <p:cNvPr id="21" name="Text 18"/>
-          <p:cNvSpPr txBox="1"/>
-          <p:nvPr/>
-        </p:nvSpPr>
-        <p:spPr>
-          <a:xfrm>
-            <a:off x="4676150" y="5056632"/>
-            <a:ext cx="384048" cy="384048"/>
-          </a:xfrm>
-          <a:prstGeom prst="rect">
-            <a:avLst/>
-          </a:prstGeom>
-          <a:noFill/>
-          <a:ln/>
-        </p:spPr>
-        <p:txBody>
-          <a:bodyPr wrap="square" lIns="0" tIns="0" rIns="0" bIns="0" rtlCol="0" anchor="ctr"/>
-          <a:lstStyle/>
-          <a:p>
-            <a:pPr algn="ctr" indent="0" marL="0">
-              <a:buNone/>
-            </a:pPr>
-            <a:r>
-              <a:rPr lang="en-US" sz="1800" b="1" dirty="0">
-                <a:solidFill>
-                  <a:srgbClr val="FFFFFF"/>
-                </a:solidFill>
-                <a:latin typeface="Microsoft YaHei" pitchFamily="34" charset="0"/>
-                <a:ea typeface="Microsoft YaHei" pitchFamily="34" charset="-122"/>
-                <a:cs typeface="Microsoft YaHei" pitchFamily="34" charset="-120"/>
-              </a:rPr>
-              <a:t>2</a:t>
-            </a:r>
-            <a:endParaRPr lang="en-US" sz="1800" dirty="0"/>
-          </a:p>
-        </p:txBody>
-      </p:sp>
-      <p:sp>
-        <p:nvSpPr>
-          <p:cNvPr id="22" name="Text 19"/>
-          <p:cNvSpPr txBox="1"/>
-          <p:nvPr/>
-        </p:nvSpPr>
-        <p:spPr>
-          <a:xfrm>
-            <a:off x="5288798" y="5010912"/>
-            <a:ext cx="6262817" cy="713232"/>
-          </a:xfrm>
-          <a:prstGeom prst="rect">
-            <a:avLst/>
-          </a:prstGeom>
-          <a:noFill/>
-          <a:ln/>
-        </p:spPr>
-        <p:txBody>
-          <a:bodyPr wrap="square" lIns="0" tIns="0" rIns="0" bIns="0" rtlCol="0" anchor="ctr"/>
-          <a:lstStyle/>
-          <a:p>
-            <a:pPr algn="l" indent="0" marL="0">
-              <a:lnSpc>
-                <a:spcPct val="122000"/>
-              </a:lnSpc>
-              <a:buNone/>
-            </a:pPr>
-            <a:r>
-              <a:rPr lang="en-US" sz="1450" dirty="0">
-                <a:solidFill>
-                  <a:srgbClr val="262233"/>
-                </a:solidFill>
-                <a:latin typeface="Microsoft YaHei" pitchFamily="34" charset="0"/>
-                <a:ea typeface="Microsoft YaHei" pitchFamily="34" charset="-122"/>
-                <a:cs typeface="Microsoft YaHei" pitchFamily="34" charset="-120"/>
-              </a:rPr>
-              <a:t>二语英语网络持续扩展，并形成更清晰的局部结构</a:t>
-            </a:r>
-            <a:endParaRPr lang="en-US" sz="1450" dirty="0"/>
-          </a:p>
-        </p:txBody>
-      </p:sp>
-      <p:sp>
-        <p:nvSpPr>
-          <p:cNvPr id="23" name="Shape 20"/>
-          <p:cNvSpPr/>
-          <p:nvPr/>
-        </p:nvSpPr>
-        <p:spPr>
-          <a:xfrm>
-            <a:off x="4676150" y="5769864"/>
-            <a:ext cx="384048" cy="384048"/>
-          </a:xfrm>
-          <a:prstGeom prst="ellipse">
-            <a:avLst/>
-          </a:prstGeom>
-          <a:solidFill>
-            <a:srgbClr val="8A68B0"/>
-          </a:solidFill>
-          <a:ln/>
-        </p:spPr>
-      </p:sp>
-      <p:sp>
-        <p:nvSpPr>
-          <p:cNvPr id="24" name="Text 21"/>
-          <p:cNvSpPr txBox="1"/>
-          <p:nvPr/>
-        </p:nvSpPr>
-        <p:spPr>
-          <a:xfrm>
-            <a:off x="4676150" y="5769864"/>
-            <a:ext cx="384048" cy="384048"/>
-          </a:xfrm>
-          <a:prstGeom prst="rect">
-            <a:avLst/>
-          </a:prstGeom>
-          <a:noFill/>
-          <a:ln/>
-        </p:spPr>
-        <p:txBody>
-          <a:bodyPr wrap="square" lIns="0" tIns="0" rIns="0" bIns="0" rtlCol="0" anchor="ctr"/>
-          <a:lstStyle/>
-          <a:p>
-            <a:pPr algn="ctr" indent="0" marL="0">
-              <a:buNone/>
-            </a:pPr>
-            <a:r>
-              <a:rPr lang="en-US" sz="1800" b="1" dirty="0">
-                <a:solidFill>
-                  <a:srgbClr val="FFFFFF"/>
-                </a:solidFill>
-                <a:latin typeface="Microsoft YaHei" pitchFamily="34" charset="0"/>
-                <a:ea typeface="Microsoft YaHei" pitchFamily="34" charset="-122"/>
-                <a:cs typeface="Microsoft YaHei" pitchFamily="34" charset="-120"/>
-              </a:rPr>
-              <a:t>3</a:t>
-            </a:r>
-            <a:endParaRPr lang="en-US" sz="1800" dirty="0"/>
-          </a:p>
-        </p:txBody>
-      </p:sp>
-      <p:sp>
-        <p:nvSpPr>
-          <p:cNvPr id="25" name="Text 22"/>
-          <p:cNvSpPr txBox="1"/>
-          <p:nvPr/>
-        </p:nvSpPr>
-        <p:spPr>
-          <a:xfrm>
-            <a:off x="5288798" y="5724144"/>
-            <a:ext cx="6262817" cy="713232"/>
-          </a:xfrm>
-          <a:prstGeom prst="rect">
-            <a:avLst/>
-          </a:prstGeom>
-          <a:noFill/>
-          <a:ln/>
-        </p:spPr>
-        <p:txBody>
-          <a:bodyPr wrap="square" lIns="0" tIns="0" rIns="0" bIns="0" rtlCol="0" anchor="ctr"/>
-          <a:lstStyle/>
-          <a:p>
-            <a:pPr algn="l" indent="0" marL="0">
-              <a:lnSpc>
-                <a:spcPct val="122000"/>
-              </a:lnSpc>
-              <a:buNone/>
-            </a:pPr>
-            <a:r>
-              <a:rPr lang="en-US" sz="1450" dirty="0">
-                <a:solidFill>
-                  <a:srgbClr val="262233"/>
-                </a:solidFill>
-                <a:latin typeface="Microsoft YaHei" pitchFamily="34" charset="0"/>
-                <a:ea typeface="Microsoft YaHei" pitchFamily="34" charset="-122"/>
-                <a:cs typeface="Microsoft YaHei" pitchFamily="34" charset="-120"/>
-              </a:rPr>
-              <a:t>从初二到高二，母语与二语的全局网络差异明显缩小</a:t>
-            </a:r>
-            <a:endParaRPr lang="en-US" sz="1450" dirty="0"/>
+              <a:t>论文首页</a:t>
+            </a:r>
+            <a:endParaRPr lang="en-US" sz="1250" dirty="0"/>
           </a:p>
         </p:txBody>
       </p:sp>
